--- a/docs/pptx/auc3/ritu-auc3-adjcif-anemia2.pptx
+++ b/docs/pptx/auc3/ritu-auc3-adjcif-anemia2.pptx
@@ -2271,7 +2271,7 @@
           </p:nvSpPr>
           <p:spPr>
             <a:xfrm>
-              <a:off x="910695" y="5305641"/>
+              <a:off x="910695" y="5303991"/>
               <a:ext cx="7706515" cy="0"/>
             </a:xfrm>
             <a:custGeom>
@@ -2314,7 +2314,7 @@
           </p:nvSpPr>
           <p:spPr>
             <a:xfrm>
-              <a:off x="910695" y="4756080"/>
+              <a:off x="910695" y="4751129"/>
               <a:ext cx="7706515" cy="0"/>
             </a:xfrm>
             <a:custGeom>
@@ -2357,7 +2357,7 @@
           </p:nvSpPr>
           <p:spPr>
             <a:xfrm>
-              <a:off x="910695" y="4206518"/>
+              <a:off x="910695" y="4198267"/>
               <a:ext cx="7706515" cy="0"/>
             </a:xfrm>
             <a:custGeom>
@@ -2400,7 +2400,7 @@
           </p:nvSpPr>
           <p:spPr>
             <a:xfrm>
-              <a:off x="910695" y="3656957"/>
+              <a:off x="910695" y="3645405"/>
               <a:ext cx="7706515" cy="0"/>
             </a:xfrm>
             <a:custGeom>
@@ -2443,7 +2443,7 @@
           </p:nvSpPr>
           <p:spPr>
             <a:xfrm>
-              <a:off x="910695" y="3107396"/>
+              <a:off x="910695" y="3092543"/>
               <a:ext cx="7706515" cy="0"/>
             </a:xfrm>
             <a:custGeom>
@@ -2701,7 +2701,7 @@
           </p:nvSpPr>
           <p:spPr>
             <a:xfrm>
-              <a:off x="910695" y="5030860"/>
+              <a:off x="910695" y="5027560"/>
               <a:ext cx="7706515" cy="0"/>
             </a:xfrm>
             <a:custGeom>
@@ -2744,7 +2744,7 @@
           </p:nvSpPr>
           <p:spPr>
             <a:xfrm>
-              <a:off x="910695" y="4481299"/>
+              <a:off x="910695" y="4474698"/>
               <a:ext cx="7706515" cy="0"/>
             </a:xfrm>
             <a:custGeom>
@@ -2787,7 +2787,7 @@
           </p:nvSpPr>
           <p:spPr>
             <a:xfrm>
-              <a:off x="910695" y="3931738"/>
+              <a:off x="910695" y="3921836"/>
               <a:ext cx="7706515" cy="0"/>
             </a:xfrm>
             <a:custGeom>
@@ -2830,7 +2830,7 @@
           </p:nvSpPr>
           <p:spPr>
             <a:xfrm>
-              <a:off x="910695" y="3382176"/>
+              <a:off x="910695" y="3368974"/>
               <a:ext cx="7706515" cy="0"/>
             </a:xfrm>
             <a:custGeom>
@@ -2873,7 +2873,7 @@
           </p:nvSpPr>
           <p:spPr>
             <a:xfrm>
-              <a:off x="910695" y="2832615"/>
+              <a:off x="910695" y="2816113"/>
               <a:ext cx="7706515" cy="0"/>
             </a:xfrm>
             <a:custGeom>
@@ -3045,228 +3045,222 @@
           </p:nvSpPr>
           <p:spPr>
             <a:xfrm>
-              <a:off x="1260991" y="3260938"/>
-              <a:ext cx="7005923" cy="2285468"/>
+              <a:off x="1260991" y="3269737"/>
+              <a:ext cx="7005923" cy="2276081"/>
             </a:xfrm>
             <a:custGeom>
               <a:avLst/>
               <a:pathLst>
-                <a:path w="7005923" h="2285468">
+                <a:path w="7005923" h="2276081">
                   <a:moveTo>
-                    <a:pt x="0" y="2285468"/>
+                    <a:pt x="0" y="2276081"/>
                   </a:moveTo>
                   <a:lnTo>
-                    <a:pt x="89819" y="2285468"/>
-                  </a:lnTo>
-                  <a:lnTo>
-                    <a:pt x="89819" y="2249982"/>
-                  </a:lnTo>
-                  <a:lnTo>
-                    <a:pt x="269458" y="2249982"/>
-                  </a:lnTo>
-                  <a:lnTo>
-                    <a:pt x="269458" y="2214305"/>
-                  </a:lnTo>
-                  <a:lnTo>
-                    <a:pt x="359278" y="2214305"/>
-                  </a:lnTo>
-                  <a:lnTo>
-                    <a:pt x="359278" y="2181112"/>
-                  </a:lnTo>
-                  <a:lnTo>
-                    <a:pt x="538917" y="2181112"/>
-                  </a:lnTo>
-                  <a:lnTo>
-                    <a:pt x="538917" y="2120666"/>
-                  </a:lnTo>
-                  <a:lnTo>
-                    <a:pt x="628736" y="2120666"/>
-                  </a:lnTo>
-                  <a:lnTo>
-                    <a:pt x="628736" y="2087467"/>
-                  </a:lnTo>
-                  <a:lnTo>
-                    <a:pt x="718556" y="2087467"/>
-                  </a:lnTo>
-                  <a:lnTo>
-                    <a:pt x="718556" y="2026567"/>
-                  </a:lnTo>
-                  <a:lnTo>
-                    <a:pt x="898195" y="2026567"/>
-                  </a:lnTo>
-                  <a:lnTo>
-                    <a:pt x="898195" y="1988845"/>
-                  </a:lnTo>
-                  <a:lnTo>
-                    <a:pt x="1077834" y="1988845"/>
-                  </a:lnTo>
-                  <a:lnTo>
-                    <a:pt x="1077834" y="1918776"/>
-                  </a:lnTo>
-                  <a:lnTo>
-                    <a:pt x="1167653" y="1918776"/>
-                  </a:lnTo>
-                  <a:lnTo>
-                    <a:pt x="1167653" y="1789896"/>
-                  </a:lnTo>
-                  <a:lnTo>
-                    <a:pt x="1257473" y="1789896"/>
-                  </a:lnTo>
-                  <a:lnTo>
-                    <a:pt x="1257473" y="1746648"/>
-                  </a:lnTo>
-                  <a:lnTo>
-                    <a:pt x="1796390" y="1746648"/>
-                  </a:lnTo>
-                  <a:lnTo>
-                    <a:pt x="1796390" y="1703904"/>
-                  </a:lnTo>
-                  <a:lnTo>
-                    <a:pt x="2065849" y="1703904"/>
-                  </a:lnTo>
-                  <a:lnTo>
-                    <a:pt x="2065849" y="1659707"/>
-                  </a:lnTo>
-                  <a:lnTo>
-                    <a:pt x="2155668" y="1659707"/>
-                  </a:lnTo>
-                  <a:lnTo>
-                    <a:pt x="2155668" y="1615959"/>
-                  </a:lnTo>
-                  <a:lnTo>
-                    <a:pt x="2335307" y="1615959"/>
-                  </a:lnTo>
-                  <a:lnTo>
-                    <a:pt x="2335307" y="1573749"/>
-                  </a:lnTo>
-                  <a:lnTo>
-                    <a:pt x="2425127" y="1573749"/>
-                  </a:lnTo>
-                  <a:lnTo>
-                    <a:pt x="2425127" y="1532457"/>
-                  </a:lnTo>
-                  <a:lnTo>
-                    <a:pt x="3053864" y="1532457"/>
-                  </a:lnTo>
-                  <a:lnTo>
-                    <a:pt x="3053864" y="1266162"/>
-                  </a:lnTo>
-                  <a:lnTo>
-                    <a:pt x="3143683" y="1266162"/>
-                  </a:lnTo>
-                  <a:lnTo>
-                    <a:pt x="3143683" y="1188497"/>
-                  </a:lnTo>
-                  <a:lnTo>
-                    <a:pt x="3233503" y="1188497"/>
-                  </a:lnTo>
-                  <a:lnTo>
-                    <a:pt x="3233503" y="1146802"/>
-                  </a:lnTo>
-                  <a:lnTo>
-                    <a:pt x="3323322" y="1146802"/>
-                  </a:lnTo>
-                  <a:lnTo>
-                    <a:pt x="3323322" y="1105349"/>
-                  </a:lnTo>
-                  <a:lnTo>
-                    <a:pt x="3502961" y="1105349"/>
-                  </a:lnTo>
-                  <a:lnTo>
-                    <a:pt x="3502961" y="1022997"/>
-                  </a:lnTo>
-                  <a:lnTo>
-                    <a:pt x="3952059" y="1022997"/>
-                  </a:lnTo>
-                  <a:lnTo>
-                    <a:pt x="3952059" y="936199"/>
-                  </a:lnTo>
-                  <a:lnTo>
-                    <a:pt x="4670615" y="936199"/>
-                  </a:lnTo>
-                  <a:lnTo>
-                    <a:pt x="4670615" y="850347"/>
-                  </a:lnTo>
-                  <a:lnTo>
-                    <a:pt x="4760435" y="850347"/>
-                  </a:lnTo>
-                  <a:lnTo>
-                    <a:pt x="4760435" y="808018"/>
-                  </a:lnTo>
-                  <a:lnTo>
-                    <a:pt x="4940074" y="808018"/>
-                  </a:lnTo>
-                  <a:lnTo>
-                    <a:pt x="4940074" y="685307"/>
-                  </a:lnTo>
-                  <a:lnTo>
-                    <a:pt x="5119713" y="685307"/>
-                  </a:lnTo>
-                  <a:lnTo>
-                    <a:pt x="5119713" y="643078"/>
-                  </a:lnTo>
-                  <a:lnTo>
-                    <a:pt x="5748449" y="643078"/>
-                  </a:lnTo>
-                  <a:lnTo>
-                    <a:pt x="5748449" y="601950"/>
-                  </a:lnTo>
-                  <a:lnTo>
-                    <a:pt x="5928089" y="601950"/>
-                  </a:lnTo>
-                  <a:lnTo>
-                    <a:pt x="5928089" y="561854"/>
-                  </a:lnTo>
-                  <a:lnTo>
-                    <a:pt x="6017908" y="561854"/>
-                  </a:lnTo>
-                  <a:lnTo>
-                    <a:pt x="6017908" y="522758"/>
-                  </a:lnTo>
-                  <a:lnTo>
-                    <a:pt x="6197547" y="522758"/>
-                  </a:lnTo>
-                  <a:lnTo>
-                    <a:pt x="6197547" y="447505"/>
-                  </a:lnTo>
-                  <a:lnTo>
-                    <a:pt x="6467006" y="447505"/>
-                  </a:lnTo>
-                  <a:lnTo>
-                    <a:pt x="6467006" y="409571"/>
-                  </a:lnTo>
-                  <a:lnTo>
-                    <a:pt x="6556825" y="409571"/>
-                  </a:lnTo>
-                  <a:lnTo>
-                    <a:pt x="6556825" y="335310"/>
-                  </a:lnTo>
-                  <a:lnTo>
-                    <a:pt x="6646645" y="335310"/>
-                  </a:lnTo>
-                  <a:lnTo>
-                    <a:pt x="6646645" y="299221"/>
-                  </a:lnTo>
-                  <a:lnTo>
-                    <a:pt x="6736464" y="299221"/>
-                  </a:lnTo>
-                  <a:lnTo>
-                    <a:pt x="6736464" y="229574"/>
-                  </a:lnTo>
-                  <a:lnTo>
-                    <a:pt x="6826284" y="229574"/>
-                  </a:lnTo>
-                  <a:lnTo>
-                    <a:pt x="6826284" y="99014"/>
-                  </a:lnTo>
-                  <a:lnTo>
-                    <a:pt x="6916103" y="99014"/>
-                  </a:lnTo>
-                  <a:lnTo>
-                    <a:pt x="6916103" y="65752"/>
-                  </a:lnTo>
-                  <a:lnTo>
-                    <a:pt x="7005923" y="65752"/>
+                    <a:pt x="89819" y="2276081"/>
+                  </a:lnTo>
+                  <a:lnTo>
+                    <a:pt x="89819" y="2239794"/>
+                  </a:lnTo>
+                  <a:lnTo>
+                    <a:pt x="269458" y="2239794"/>
+                  </a:lnTo>
+                  <a:lnTo>
+                    <a:pt x="269458" y="2203392"/>
+                  </a:lnTo>
+                  <a:lnTo>
+                    <a:pt x="359278" y="2203392"/>
+                  </a:lnTo>
+                  <a:lnTo>
+                    <a:pt x="359278" y="2169511"/>
+                  </a:lnTo>
+                  <a:lnTo>
+                    <a:pt x="538917" y="2169511"/>
+                  </a:lnTo>
+                  <a:lnTo>
+                    <a:pt x="538917" y="2107703"/>
+                  </a:lnTo>
+                  <a:lnTo>
+                    <a:pt x="628736" y="2107703"/>
+                  </a:lnTo>
+                  <a:lnTo>
+                    <a:pt x="628736" y="2074485"/>
+                  </a:lnTo>
+                  <a:lnTo>
+                    <a:pt x="718556" y="2074485"/>
+                  </a:lnTo>
+                  <a:lnTo>
+                    <a:pt x="718556" y="2013328"/>
+                  </a:lnTo>
+                  <a:lnTo>
+                    <a:pt x="898195" y="2013328"/>
+                  </a:lnTo>
+                  <a:lnTo>
+                    <a:pt x="898195" y="1975199"/>
+                  </a:lnTo>
+                  <a:lnTo>
+                    <a:pt x="1077834" y="1975199"/>
+                  </a:lnTo>
+                  <a:lnTo>
+                    <a:pt x="1077834" y="1904073"/>
+                  </a:lnTo>
+                  <a:lnTo>
+                    <a:pt x="1167653" y="1904073"/>
+                  </a:lnTo>
+                  <a:lnTo>
+                    <a:pt x="1167653" y="1772260"/>
+                  </a:lnTo>
+                  <a:lnTo>
+                    <a:pt x="1257473" y="1772260"/>
+                  </a:lnTo>
+                  <a:lnTo>
+                    <a:pt x="1257473" y="1728454"/>
+                  </a:lnTo>
+                  <a:lnTo>
+                    <a:pt x="1796390" y="1728454"/>
+                  </a:lnTo>
+                  <a:lnTo>
+                    <a:pt x="1796390" y="1685098"/>
+                  </a:lnTo>
+                  <a:lnTo>
+                    <a:pt x="2065849" y="1685098"/>
+                  </a:lnTo>
+                  <a:lnTo>
+                    <a:pt x="2065849" y="1640600"/>
+                  </a:lnTo>
+                  <a:lnTo>
+                    <a:pt x="2155668" y="1640600"/>
+                  </a:lnTo>
+                  <a:lnTo>
+                    <a:pt x="2155668" y="1596458"/>
+                  </a:lnTo>
+                  <a:lnTo>
+                    <a:pt x="2335307" y="1596458"/>
+                  </a:lnTo>
+                  <a:lnTo>
+                    <a:pt x="2335307" y="1553809"/>
+                  </a:lnTo>
+                  <a:lnTo>
+                    <a:pt x="3053864" y="1553809"/>
+                  </a:lnTo>
+                  <a:lnTo>
+                    <a:pt x="3053864" y="1286641"/>
+                  </a:lnTo>
+                  <a:lnTo>
+                    <a:pt x="3143683" y="1286641"/>
+                  </a:lnTo>
+                  <a:lnTo>
+                    <a:pt x="3143683" y="1208454"/>
+                  </a:lnTo>
+                  <a:lnTo>
+                    <a:pt x="3233503" y="1208454"/>
+                  </a:lnTo>
+                  <a:lnTo>
+                    <a:pt x="3233503" y="1166197"/>
+                  </a:lnTo>
+                  <a:lnTo>
+                    <a:pt x="3323322" y="1166197"/>
+                  </a:lnTo>
+                  <a:lnTo>
+                    <a:pt x="3323322" y="1124176"/>
+                  </a:lnTo>
+                  <a:lnTo>
+                    <a:pt x="3502961" y="1124176"/>
+                  </a:lnTo>
+                  <a:lnTo>
+                    <a:pt x="3502961" y="1040707"/>
+                  </a:lnTo>
+                  <a:lnTo>
+                    <a:pt x="3952059" y="1040707"/>
+                  </a:lnTo>
+                  <a:lnTo>
+                    <a:pt x="3952059" y="952560"/>
+                  </a:lnTo>
+                  <a:lnTo>
+                    <a:pt x="4670615" y="952560"/>
+                  </a:lnTo>
+                  <a:lnTo>
+                    <a:pt x="4670615" y="865509"/>
+                  </a:lnTo>
+                  <a:lnTo>
+                    <a:pt x="4760435" y="865509"/>
+                  </a:lnTo>
+                  <a:lnTo>
+                    <a:pt x="4760435" y="822522"/>
+                  </a:lnTo>
+                  <a:lnTo>
+                    <a:pt x="4940074" y="822522"/>
+                  </a:lnTo>
+                  <a:lnTo>
+                    <a:pt x="4940074" y="697911"/>
+                  </a:lnTo>
+                  <a:lnTo>
+                    <a:pt x="5119713" y="697911"/>
+                  </a:lnTo>
+                  <a:lnTo>
+                    <a:pt x="5119713" y="654967"/>
+                  </a:lnTo>
+                  <a:lnTo>
+                    <a:pt x="5748449" y="654967"/>
+                  </a:lnTo>
+                  <a:lnTo>
+                    <a:pt x="5748449" y="613144"/>
+                  </a:lnTo>
+                  <a:lnTo>
+                    <a:pt x="5928089" y="613144"/>
+                  </a:lnTo>
+                  <a:lnTo>
+                    <a:pt x="5928089" y="572348"/>
+                  </a:lnTo>
+                  <a:lnTo>
+                    <a:pt x="6017908" y="572348"/>
+                  </a:lnTo>
+                  <a:lnTo>
+                    <a:pt x="6017908" y="532575"/>
+                  </a:lnTo>
+                  <a:lnTo>
+                    <a:pt x="6197547" y="532575"/>
+                  </a:lnTo>
+                  <a:lnTo>
+                    <a:pt x="6197547" y="456028"/>
+                  </a:lnTo>
+                  <a:lnTo>
+                    <a:pt x="6467006" y="456028"/>
+                  </a:lnTo>
+                  <a:lnTo>
+                    <a:pt x="6467006" y="417401"/>
+                  </a:lnTo>
+                  <a:lnTo>
+                    <a:pt x="6556825" y="417401"/>
+                  </a:lnTo>
+                  <a:lnTo>
+                    <a:pt x="6556825" y="341739"/>
+                  </a:lnTo>
+                  <a:lnTo>
+                    <a:pt x="6646645" y="341739"/>
+                  </a:lnTo>
+                  <a:lnTo>
+                    <a:pt x="6646645" y="304967"/>
+                  </a:lnTo>
+                  <a:lnTo>
+                    <a:pt x="6736464" y="304967"/>
+                  </a:lnTo>
+                  <a:lnTo>
+                    <a:pt x="6736464" y="234003"/>
+                  </a:lnTo>
+                  <a:lnTo>
+                    <a:pt x="6826284" y="234003"/>
+                  </a:lnTo>
+                  <a:lnTo>
+                    <a:pt x="6826284" y="100980"/>
+                  </a:lnTo>
+                  <a:lnTo>
+                    <a:pt x="6916103" y="100980"/>
+                  </a:lnTo>
+                  <a:lnTo>
+                    <a:pt x="6916103" y="67049"/>
+                  </a:lnTo>
+                  <a:lnTo>
+                    <a:pt x="7005923" y="67049"/>
                   </a:lnTo>
                   <a:lnTo>
                     <a:pt x="7005923" y="0"/>
@@ -3299,227 +3293,221 @@
           <p:spPr>
             <a:xfrm>
               <a:off x="1260991" y="2861938"/>
-              <a:ext cx="7005923" cy="2670689"/>
+              <a:ext cx="7005923" cy="2669679"/>
             </a:xfrm>
             <a:custGeom>
               <a:avLst/>
               <a:pathLst>
-                <a:path w="7005923" h="2670689">
+                <a:path w="7005923" h="2669679">
                   <a:moveTo>
-                    <a:pt x="0" y="2670689"/>
+                    <a:pt x="0" y="2669679"/>
                   </a:moveTo>
                   <a:lnTo>
-                    <a:pt x="89819" y="2670689"/>
-                  </a:lnTo>
-                  <a:lnTo>
-                    <a:pt x="89819" y="2622272"/>
-                  </a:lnTo>
-                  <a:lnTo>
-                    <a:pt x="269458" y="2622272"/>
-                  </a:lnTo>
-                  <a:lnTo>
-                    <a:pt x="269458" y="2574903"/>
-                  </a:lnTo>
-                  <a:lnTo>
-                    <a:pt x="359278" y="2574903"/>
-                  </a:lnTo>
-                  <a:lnTo>
-                    <a:pt x="359278" y="2531840"/>
-                  </a:lnTo>
-                  <a:lnTo>
-                    <a:pt x="538917" y="2531840"/>
-                  </a:lnTo>
-                  <a:lnTo>
-                    <a:pt x="538917" y="2455371"/>
-                  </a:lnTo>
-                  <a:lnTo>
-                    <a:pt x="628736" y="2455371"/>
-                  </a:lnTo>
-                  <a:lnTo>
-                    <a:pt x="628736" y="2414151"/>
-                  </a:lnTo>
-                  <a:lnTo>
-                    <a:pt x="718556" y="2414151"/>
-                  </a:lnTo>
-                  <a:lnTo>
-                    <a:pt x="718556" y="2339375"/>
-                  </a:lnTo>
-                  <a:lnTo>
-                    <a:pt x="898195" y="2339375"/>
-                  </a:lnTo>
-                  <a:lnTo>
-                    <a:pt x="898195" y="2293329"/>
-                  </a:lnTo>
-                  <a:lnTo>
-                    <a:pt x="1077834" y="2293329"/>
-                  </a:lnTo>
-                  <a:lnTo>
-                    <a:pt x="1077834" y="2207866"/>
-                  </a:lnTo>
-                  <a:lnTo>
-                    <a:pt x="1167653" y="2207866"/>
-                  </a:lnTo>
-                  <a:lnTo>
-                    <a:pt x="1167653" y="2050030"/>
-                  </a:lnTo>
-                  <a:lnTo>
-                    <a:pt x="1257473" y="2050030"/>
-                  </a:lnTo>
-                  <a:lnTo>
-                    <a:pt x="1257473" y="1996899"/>
-                  </a:lnTo>
-                  <a:lnTo>
-                    <a:pt x="1796390" y="1996899"/>
-                  </a:lnTo>
-                  <a:lnTo>
-                    <a:pt x="1796390" y="1944372"/>
-                  </a:lnTo>
-                  <a:lnTo>
-                    <a:pt x="2065849" y="1944372"/>
-                  </a:lnTo>
-                  <a:lnTo>
-                    <a:pt x="2065849" y="1890089"/>
-                  </a:lnTo>
-                  <a:lnTo>
-                    <a:pt x="2155668" y="1890089"/>
-                  </a:lnTo>
-                  <a:lnTo>
-                    <a:pt x="2155668" y="1836430"/>
-                  </a:lnTo>
-                  <a:lnTo>
-                    <a:pt x="2335307" y="1836430"/>
-                  </a:lnTo>
-                  <a:lnTo>
-                    <a:pt x="2335307" y="1784758"/>
-                  </a:lnTo>
-                  <a:lnTo>
-                    <a:pt x="2425127" y="1784758"/>
-                  </a:lnTo>
-                  <a:lnTo>
-                    <a:pt x="2425127" y="1734332"/>
-                  </a:lnTo>
-                  <a:lnTo>
-                    <a:pt x="3053864" y="1734332"/>
-                  </a:lnTo>
-                  <a:lnTo>
-                    <a:pt x="3053864" y="1412989"/>
-                  </a:lnTo>
-                  <a:lnTo>
-                    <a:pt x="3143683" y="1412989"/>
-                  </a:lnTo>
-                  <a:lnTo>
-                    <a:pt x="3143683" y="1320747"/>
-                  </a:lnTo>
-                  <a:lnTo>
-                    <a:pt x="3233503" y="1320747"/>
-                  </a:lnTo>
-                  <a:lnTo>
-                    <a:pt x="3233503" y="1271524"/>
-                  </a:lnTo>
-                  <a:lnTo>
-                    <a:pt x="3323322" y="1271524"/>
-                  </a:lnTo>
-                  <a:lnTo>
-                    <a:pt x="3323322" y="1222797"/>
-                  </a:lnTo>
-                  <a:lnTo>
-                    <a:pt x="3502961" y="1222797"/>
-                  </a:lnTo>
-                  <a:lnTo>
-                    <a:pt x="3502961" y="1126623"/>
-                  </a:lnTo>
-                  <a:lnTo>
-                    <a:pt x="3952059" y="1126623"/>
-                  </a:lnTo>
-                  <a:lnTo>
-                    <a:pt x="3952059" y="1026167"/>
-                  </a:lnTo>
-                  <a:lnTo>
-                    <a:pt x="4670615" y="1026167"/>
-                  </a:lnTo>
-                  <a:lnTo>
-                    <a:pt x="4670615" y="927721"/>
-                  </a:lnTo>
-                  <a:lnTo>
-                    <a:pt x="4760435" y="927721"/>
-                  </a:lnTo>
-                  <a:lnTo>
-                    <a:pt x="4760435" y="879517"/>
-                  </a:lnTo>
-                  <a:lnTo>
-                    <a:pt x="4940074" y="879517"/>
-                  </a:lnTo>
-                  <a:lnTo>
-                    <a:pt x="4940074" y="741007"/>
-                  </a:lnTo>
-                  <a:lnTo>
-                    <a:pt x="5119713" y="741007"/>
-                  </a:lnTo>
-                  <a:lnTo>
-                    <a:pt x="5119713" y="693760"/>
-                  </a:lnTo>
-                  <a:lnTo>
-                    <a:pt x="5748449" y="693760"/>
-                  </a:lnTo>
-                  <a:lnTo>
-                    <a:pt x="5748449" y="647951"/>
-                  </a:lnTo>
-                  <a:lnTo>
-                    <a:pt x="5928089" y="647951"/>
-                  </a:lnTo>
-                  <a:lnTo>
-                    <a:pt x="5928089" y="603486"/>
-                  </a:lnTo>
-                  <a:lnTo>
-                    <a:pt x="6017908" y="603486"/>
-                  </a:lnTo>
-                  <a:lnTo>
-                    <a:pt x="6017908" y="560311"/>
-                  </a:lnTo>
-                  <a:lnTo>
-                    <a:pt x="6197547" y="560311"/>
-                  </a:lnTo>
-                  <a:lnTo>
-                    <a:pt x="6197547" y="477714"/>
-                  </a:lnTo>
-                  <a:lnTo>
-                    <a:pt x="6467006" y="477714"/>
-                  </a:lnTo>
-                  <a:lnTo>
-                    <a:pt x="6467006" y="436329"/>
-                  </a:lnTo>
-                  <a:lnTo>
-                    <a:pt x="6556825" y="436329"/>
-                  </a:lnTo>
-                  <a:lnTo>
-                    <a:pt x="6556825" y="355794"/>
-                  </a:lnTo>
-                  <a:lnTo>
-                    <a:pt x="6646645" y="355794"/>
-                  </a:lnTo>
-                  <a:lnTo>
-                    <a:pt x="6646645" y="316886"/>
-                  </a:lnTo>
-                  <a:lnTo>
-                    <a:pt x="6736464" y="316886"/>
-                  </a:lnTo>
-                  <a:lnTo>
-                    <a:pt x="6736464" y="242221"/>
-                  </a:lnTo>
-                  <a:lnTo>
-                    <a:pt x="6826284" y="242221"/>
-                  </a:lnTo>
-                  <a:lnTo>
-                    <a:pt x="6826284" y="103741"/>
-                  </a:lnTo>
-                  <a:lnTo>
-                    <a:pt x="6916103" y="103741"/>
-                  </a:lnTo>
-                  <a:lnTo>
-                    <a:pt x="6916103" y="68768"/>
-                  </a:lnTo>
-                  <a:lnTo>
-                    <a:pt x="7005923" y="68768"/>
+                    <a:pt x="89819" y="2669679"/>
+                  </a:lnTo>
+                  <a:lnTo>
+                    <a:pt x="89819" y="2619999"/>
+                  </a:lnTo>
+                  <a:lnTo>
+                    <a:pt x="269458" y="2619999"/>
+                  </a:lnTo>
+                  <a:lnTo>
+                    <a:pt x="269458" y="2571509"/>
+                  </a:lnTo>
+                  <a:lnTo>
+                    <a:pt x="359278" y="2571509"/>
+                  </a:lnTo>
+                  <a:lnTo>
+                    <a:pt x="359278" y="2527409"/>
+                  </a:lnTo>
+                  <a:lnTo>
+                    <a:pt x="538917" y="2527409"/>
+                  </a:lnTo>
+                  <a:lnTo>
+                    <a:pt x="538917" y="2448933"/>
+                  </a:lnTo>
+                  <a:lnTo>
+                    <a:pt x="628736" y="2448933"/>
+                  </a:lnTo>
+                  <a:lnTo>
+                    <a:pt x="628736" y="2407516"/>
+                  </a:lnTo>
+                  <a:lnTo>
+                    <a:pt x="718556" y="2407516"/>
+                  </a:lnTo>
+                  <a:lnTo>
+                    <a:pt x="718556" y="2332064"/>
+                  </a:lnTo>
+                  <a:lnTo>
+                    <a:pt x="898195" y="2332064"/>
+                  </a:lnTo>
+                  <a:lnTo>
+                    <a:pt x="898195" y="2285283"/>
+                  </a:lnTo>
+                  <a:lnTo>
+                    <a:pt x="1077834" y="2285283"/>
+                  </a:lnTo>
+                  <a:lnTo>
+                    <a:pt x="1077834" y="2198072"/>
+                  </a:lnTo>
+                  <a:lnTo>
+                    <a:pt x="1167653" y="2198072"/>
+                  </a:lnTo>
+                  <a:lnTo>
+                    <a:pt x="1167653" y="2035777"/>
+                  </a:lnTo>
+                  <a:lnTo>
+                    <a:pt x="1257473" y="2035777"/>
+                  </a:lnTo>
+                  <a:lnTo>
+                    <a:pt x="1257473" y="1981675"/>
+                  </a:lnTo>
+                  <a:lnTo>
+                    <a:pt x="1796390" y="1981675"/>
+                  </a:lnTo>
+                  <a:lnTo>
+                    <a:pt x="1796390" y="1928119"/>
+                  </a:lnTo>
+                  <a:lnTo>
+                    <a:pt x="2065849" y="1928119"/>
+                  </a:lnTo>
+                  <a:lnTo>
+                    <a:pt x="2065849" y="1873191"/>
+                  </a:lnTo>
+                  <a:lnTo>
+                    <a:pt x="2155668" y="1873191"/>
+                  </a:lnTo>
+                  <a:lnTo>
+                    <a:pt x="2155668" y="1818791"/>
+                  </a:lnTo>
+                  <a:lnTo>
+                    <a:pt x="2335307" y="1818791"/>
+                  </a:lnTo>
+                  <a:lnTo>
+                    <a:pt x="2335307" y="1766352"/>
+                  </a:lnTo>
+                  <a:lnTo>
+                    <a:pt x="3053864" y="1766352"/>
+                  </a:lnTo>
+                  <a:lnTo>
+                    <a:pt x="3053864" y="1441916"/>
+                  </a:lnTo>
+                  <a:lnTo>
+                    <a:pt x="3143683" y="1441916"/>
+                  </a:lnTo>
+                  <a:lnTo>
+                    <a:pt x="3143683" y="1348556"/>
+                  </a:lnTo>
+                  <a:lnTo>
+                    <a:pt x="3233503" y="1348556"/>
+                  </a:lnTo>
+                  <a:lnTo>
+                    <a:pt x="3233503" y="1298418"/>
+                  </a:lnTo>
+                  <a:lnTo>
+                    <a:pt x="3323322" y="1298418"/>
+                  </a:lnTo>
+                  <a:lnTo>
+                    <a:pt x="3323322" y="1248786"/>
+                  </a:lnTo>
+                  <a:lnTo>
+                    <a:pt x="3502961" y="1248786"/>
+                  </a:lnTo>
+                  <a:lnTo>
+                    <a:pt x="3502961" y="1150863"/>
+                  </a:lnTo>
+                  <a:lnTo>
+                    <a:pt x="3952059" y="1150863"/>
+                  </a:lnTo>
+                  <a:lnTo>
+                    <a:pt x="3952059" y="1048406"/>
+                  </a:lnTo>
+                  <a:lnTo>
+                    <a:pt x="4670615" y="1048406"/>
+                  </a:lnTo>
+                  <a:lnTo>
+                    <a:pt x="4670615" y="948174"/>
+                  </a:lnTo>
+                  <a:lnTo>
+                    <a:pt x="4760435" y="948174"/>
+                  </a:lnTo>
+                  <a:lnTo>
+                    <a:pt x="4760435" y="899022"/>
+                  </a:lnTo>
+                  <a:lnTo>
+                    <a:pt x="4940074" y="899022"/>
+                  </a:lnTo>
+                  <a:lnTo>
+                    <a:pt x="4940074" y="757805"/>
+                  </a:lnTo>
+                  <a:lnTo>
+                    <a:pt x="5119713" y="757805"/>
+                  </a:lnTo>
+                  <a:lnTo>
+                    <a:pt x="5119713" y="709566"/>
+                  </a:lnTo>
+                  <a:lnTo>
+                    <a:pt x="5748449" y="709566"/>
+                  </a:lnTo>
+                  <a:lnTo>
+                    <a:pt x="5748449" y="662795"/>
+                  </a:lnTo>
+                  <a:lnTo>
+                    <a:pt x="5928089" y="662795"/>
+                  </a:lnTo>
+                  <a:lnTo>
+                    <a:pt x="5928089" y="617369"/>
+                  </a:lnTo>
+                  <a:lnTo>
+                    <a:pt x="6017908" y="617369"/>
+                  </a:lnTo>
+                  <a:lnTo>
+                    <a:pt x="6017908" y="573268"/>
+                  </a:lnTo>
+                  <a:lnTo>
+                    <a:pt x="6197547" y="573268"/>
+                  </a:lnTo>
+                  <a:lnTo>
+                    <a:pt x="6197547" y="488902"/>
+                  </a:lnTo>
+                  <a:lnTo>
+                    <a:pt x="6467006" y="488902"/>
+                  </a:lnTo>
+                  <a:lnTo>
+                    <a:pt x="6467006" y="446584"/>
+                  </a:lnTo>
+                  <a:lnTo>
+                    <a:pt x="6556825" y="446584"/>
+                  </a:lnTo>
+                  <a:lnTo>
+                    <a:pt x="6556825" y="364181"/>
+                  </a:lnTo>
+                  <a:lnTo>
+                    <a:pt x="6646645" y="364181"/>
+                  </a:lnTo>
+                  <a:lnTo>
+                    <a:pt x="6646645" y="324367"/>
+                  </a:lnTo>
+                  <a:lnTo>
+                    <a:pt x="6736464" y="324367"/>
+                  </a:lnTo>
+                  <a:lnTo>
+                    <a:pt x="6736464" y="247960"/>
+                  </a:lnTo>
+                  <a:lnTo>
+                    <a:pt x="6826284" y="247960"/>
+                  </a:lnTo>
+                  <a:lnTo>
+                    <a:pt x="6826284" y="106253"/>
+                  </a:lnTo>
+                  <a:lnTo>
+                    <a:pt x="6916103" y="106253"/>
+                  </a:lnTo>
+                  <a:lnTo>
+                    <a:pt x="6916103" y="70423"/>
+                  </a:lnTo>
+                  <a:lnTo>
+                    <a:pt x="7005923" y="70423"/>
                   </a:lnTo>
                   <a:lnTo>
                     <a:pt x="7005923" y="0"/>
@@ -3597,7 +3585,7 @@
           </p:nvSpPr>
           <p:spPr>
             <a:xfrm>
-              <a:off x="692708" y="4990810"/>
+              <a:off x="692708" y="4987509"/>
               <a:ext cx="155356" cy="80101"/>
             </a:xfrm>
             <a:prstGeom prst="rect">
@@ -3643,7 +3631,7 @@
           </p:nvSpPr>
           <p:spPr>
             <a:xfrm>
-              <a:off x="692708" y="4441248"/>
+              <a:off x="692708" y="4434647"/>
               <a:ext cx="155356" cy="80101"/>
             </a:xfrm>
             <a:prstGeom prst="rect">
@@ -3689,7 +3677,7 @@
           </p:nvSpPr>
           <p:spPr>
             <a:xfrm>
-              <a:off x="692708" y="3891687"/>
+              <a:off x="692708" y="3881786"/>
               <a:ext cx="155356" cy="80101"/>
             </a:xfrm>
             <a:prstGeom prst="rect">
@@ -3735,7 +3723,7 @@
           </p:nvSpPr>
           <p:spPr>
             <a:xfrm>
-              <a:off x="692708" y="3342126"/>
+              <a:off x="692708" y="3328924"/>
               <a:ext cx="155356" cy="80101"/>
             </a:xfrm>
             <a:prstGeom prst="rect">
@@ -3781,7 +3769,7 @@
           </p:nvSpPr>
           <p:spPr>
             <a:xfrm>
-              <a:off x="692708" y="2792564"/>
+              <a:off x="692708" y="2776062"/>
               <a:ext cx="155356" cy="80101"/>
             </a:xfrm>
             <a:prstGeom prst="rect">
@@ -4262,7 +4250,7 @@
                   <a:latin typeface="Helvetica"/>
                   <a:cs typeface="Helvetica"/>
                 </a:rPr>
-                <a:t>Discrep &gt;= +25 vs &lt;+25: subHR = 1.43 (95% CI 0.69-2.96), p = 0.341</a:t>
+                <a:t>Discrep &gt;= +25 vs &lt;+25: subHR = 1.43 (95% CI 0.69-2.99), p = 0.339</a:t>
               </a:r>
             </a:p>
           </p:txBody>
